--- a/ゲーム科1年/01_後期/プログラミングⅢ/11_基底クラスと派生クラス.pptx
+++ b/ゲーム科1年/01_後期/プログラミングⅢ/11_基底クラスと派生クラス.pptx
@@ -266,7 +266,7 @@
           <a:p>
             <a:fld id="{E9CC885B-4903-4D54-9A93-00025F12DED9}" type="datetimeFigureOut">
               <a:rPr kumimoji="1" lang="ja-JP" altLang="en-US" smtClean="0"/>
-              <a:t>2024/11/11</a:t>
+              <a:t>2025/2/7</a:t>
             </a:fld>
             <a:endParaRPr kumimoji="1" lang="ja-JP" altLang="en-US"/>
           </a:p>
@@ -496,7 +496,7 @@
           <a:p>
             <a:fld id="{E9CC885B-4903-4D54-9A93-00025F12DED9}" type="datetimeFigureOut">
               <a:rPr kumimoji="1" lang="ja-JP" altLang="en-US" smtClean="0"/>
-              <a:t>2024/11/11</a:t>
+              <a:t>2025/2/7</a:t>
             </a:fld>
             <a:endParaRPr kumimoji="1" lang="ja-JP" altLang="en-US"/>
           </a:p>
@@ -736,7 +736,7 @@
           <a:p>
             <a:fld id="{E9CC885B-4903-4D54-9A93-00025F12DED9}" type="datetimeFigureOut">
               <a:rPr kumimoji="1" lang="ja-JP" altLang="en-US" smtClean="0"/>
-              <a:t>2024/11/11</a:t>
+              <a:t>2025/2/7</a:t>
             </a:fld>
             <a:endParaRPr kumimoji="1" lang="ja-JP" altLang="en-US"/>
           </a:p>
@@ -966,7 +966,7 @@
           <a:p>
             <a:fld id="{E9CC885B-4903-4D54-9A93-00025F12DED9}" type="datetimeFigureOut">
               <a:rPr kumimoji="1" lang="ja-JP" altLang="en-US" smtClean="0"/>
-              <a:t>2024/11/11</a:t>
+              <a:t>2025/2/7</a:t>
             </a:fld>
             <a:endParaRPr kumimoji="1" lang="ja-JP" altLang="en-US"/>
           </a:p>
@@ -1241,7 +1241,7 @@
           <a:p>
             <a:fld id="{E9CC885B-4903-4D54-9A93-00025F12DED9}" type="datetimeFigureOut">
               <a:rPr kumimoji="1" lang="ja-JP" altLang="en-US" smtClean="0"/>
-              <a:t>2024/11/11</a:t>
+              <a:t>2025/2/7</a:t>
             </a:fld>
             <a:endParaRPr kumimoji="1" lang="ja-JP" altLang="en-US"/>
           </a:p>
@@ -1570,7 +1570,7 @@
           <a:p>
             <a:fld id="{E9CC885B-4903-4D54-9A93-00025F12DED9}" type="datetimeFigureOut">
               <a:rPr kumimoji="1" lang="ja-JP" altLang="en-US" smtClean="0"/>
-              <a:t>2024/11/11</a:t>
+              <a:t>2025/2/7</a:t>
             </a:fld>
             <a:endParaRPr kumimoji="1" lang="ja-JP" altLang="en-US"/>
           </a:p>
@@ -2046,7 +2046,7 @@
           <a:p>
             <a:fld id="{E9CC885B-4903-4D54-9A93-00025F12DED9}" type="datetimeFigureOut">
               <a:rPr kumimoji="1" lang="ja-JP" altLang="en-US" smtClean="0"/>
-              <a:t>2024/11/11</a:t>
+              <a:t>2025/2/7</a:t>
             </a:fld>
             <a:endParaRPr kumimoji="1" lang="ja-JP" altLang="en-US"/>
           </a:p>
@@ -2187,7 +2187,7 @@
           <a:p>
             <a:fld id="{E9CC885B-4903-4D54-9A93-00025F12DED9}" type="datetimeFigureOut">
               <a:rPr kumimoji="1" lang="ja-JP" altLang="en-US" smtClean="0"/>
-              <a:t>2024/11/11</a:t>
+              <a:t>2025/2/7</a:t>
             </a:fld>
             <a:endParaRPr kumimoji="1" lang="ja-JP" altLang="en-US"/>
           </a:p>
@@ -2300,7 +2300,7 @@
           <a:p>
             <a:fld id="{E9CC885B-4903-4D54-9A93-00025F12DED9}" type="datetimeFigureOut">
               <a:rPr kumimoji="1" lang="ja-JP" altLang="en-US" smtClean="0"/>
-              <a:t>2024/11/11</a:t>
+              <a:t>2025/2/7</a:t>
             </a:fld>
             <a:endParaRPr kumimoji="1" lang="ja-JP" altLang="en-US"/>
           </a:p>
@@ -2643,7 +2643,7 @@
           <a:p>
             <a:fld id="{E9CC885B-4903-4D54-9A93-00025F12DED9}" type="datetimeFigureOut">
               <a:rPr kumimoji="1" lang="ja-JP" altLang="en-US" smtClean="0"/>
-              <a:t>2024/11/11</a:t>
+              <a:t>2025/2/7</a:t>
             </a:fld>
             <a:endParaRPr kumimoji="1" lang="ja-JP" altLang="en-US"/>
           </a:p>
@@ -2931,7 +2931,7 @@
           <a:p>
             <a:fld id="{E9CC885B-4903-4D54-9A93-00025F12DED9}" type="datetimeFigureOut">
               <a:rPr kumimoji="1" lang="ja-JP" altLang="en-US" smtClean="0"/>
-              <a:t>2024/11/11</a:t>
+              <a:t>2025/2/7</a:t>
             </a:fld>
             <a:endParaRPr kumimoji="1" lang="ja-JP" altLang="en-US"/>
           </a:p>
@@ -3204,7 +3204,7 @@
           <a:p>
             <a:fld id="{E9CC885B-4903-4D54-9A93-00025F12DED9}" type="datetimeFigureOut">
               <a:rPr kumimoji="1" lang="ja-JP" altLang="en-US" smtClean="0"/>
-              <a:t>2024/11/11</a:t>
+              <a:t>2025/2/7</a:t>
             </a:fld>
             <a:endParaRPr kumimoji="1" lang="ja-JP" altLang="en-US"/>
           </a:p>
@@ -5167,12 +5167,24 @@
               <a:t>ポインタが</a:t>
             </a:r>
             <a:r>
-              <a:rPr lang="en-US" altLang="ja-JP" sz="2400" dirty="0"/>
+              <a:rPr lang="en-US" altLang="ja-JP" sz="2400" b="1" dirty="0">
+                <a:solidFill>
+                  <a:srgbClr val="00B050"/>
+                </a:solidFill>
+              </a:rPr>
               <a:t>Fruit</a:t>
             </a:r>
             <a:r>
+              <a:rPr lang="ja-JP" altLang="en-US" sz="2400" b="1" dirty="0">
+                <a:solidFill>
+                  <a:srgbClr val="00B050"/>
+                </a:solidFill>
+              </a:rPr>
+              <a:t>クラス</a:t>
+            </a:r>
+            <a:r>
               <a:rPr lang="ja-JP" altLang="en-US" sz="2400" dirty="0"/>
-              <a:t>クラスを参照していても、</a:t>
+              <a:t>を参照していても、</a:t>
             </a:r>
             <a:endParaRPr lang="en-US" altLang="ja-JP" sz="2400" dirty="0"/>
           </a:p>

--- a/ゲーム科1年/01_後期/プログラミングⅢ/11_基底クラスと派生クラス.pptx
+++ b/ゲーム科1年/01_後期/プログラミングⅢ/11_基底クラスと派生クラス.pptx
@@ -266,7 +266,7 @@
           <a:p>
             <a:fld id="{E9CC885B-4903-4D54-9A93-00025F12DED9}" type="datetimeFigureOut">
               <a:rPr kumimoji="1" lang="ja-JP" altLang="en-US" smtClean="0"/>
-              <a:t>2025/2/7</a:t>
+              <a:t>2025/3/3</a:t>
             </a:fld>
             <a:endParaRPr kumimoji="1" lang="ja-JP" altLang="en-US"/>
           </a:p>
@@ -496,7 +496,7 @@
           <a:p>
             <a:fld id="{E9CC885B-4903-4D54-9A93-00025F12DED9}" type="datetimeFigureOut">
               <a:rPr kumimoji="1" lang="ja-JP" altLang="en-US" smtClean="0"/>
-              <a:t>2025/2/7</a:t>
+              <a:t>2025/3/3</a:t>
             </a:fld>
             <a:endParaRPr kumimoji="1" lang="ja-JP" altLang="en-US"/>
           </a:p>
@@ -736,7 +736,7 @@
           <a:p>
             <a:fld id="{E9CC885B-4903-4D54-9A93-00025F12DED9}" type="datetimeFigureOut">
               <a:rPr kumimoji="1" lang="ja-JP" altLang="en-US" smtClean="0"/>
-              <a:t>2025/2/7</a:t>
+              <a:t>2025/3/3</a:t>
             </a:fld>
             <a:endParaRPr kumimoji="1" lang="ja-JP" altLang="en-US"/>
           </a:p>
@@ -966,7 +966,7 @@
           <a:p>
             <a:fld id="{E9CC885B-4903-4D54-9A93-00025F12DED9}" type="datetimeFigureOut">
               <a:rPr kumimoji="1" lang="ja-JP" altLang="en-US" smtClean="0"/>
-              <a:t>2025/2/7</a:t>
+              <a:t>2025/3/3</a:t>
             </a:fld>
             <a:endParaRPr kumimoji="1" lang="ja-JP" altLang="en-US"/>
           </a:p>
@@ -1241,7 +1241,7 @@
           <a:p>
             <a:fld id="{E9CC885B-4903-4D54-9A93-00025F12DED9}" type="datetimeFigureOut">
               <a:rPr kumimoji="1" lang="ja-JP" altLang="en-US" smtClean="0"/>
-              <a:t>2025/2/7</a:t>
+              <a:t>2025/3/3</a:t>
             </a:fld>
             <a:endParaRPr kumimoji="1" lang="ja-JP" altLang="en-US"/>
           </a:p>
@@ -1570,7 +1570,7 @@
           <a:p>
             <a:fld id="{E9CC885B-4903-4D54-9A93-00025F12DED9}" type="datetimeFigureOut">
               <a:rPr kumimoji="1" lang="ja-JP" altLang="en-US" smtClean="0"/>
-              <a:t>2025/2/7</a:t>
+              <a:t>2025/3/3</a:t>
             </a:fld>
             <a:endParaRPr kumimoji="1" lang="ja-JP" altLang="en-US"/>
           </a:p>
@@ -2046,7 +2046,7 @@
           <a:p>
             <a:fld id="{E9CC885B-4903-4D54-9A93-00025F12DED9}" type="datetimeFigureOut">
               <a:rPr kumimoji="1" lang="ja-JP" altLang="en-US" smtClean="0"/>
-              <a:t>2025/2/7</a:t>
+              <a:t>2025/3/3</a:t>
             </a:fld>
             <a:endParaRPr kumimoji="1" lang="ja-JP" altLang="en-US"/>
           </a:p>
@@ -2187,7 +2187,7 @@
           <a:p>
             <a:fld id="{E9CC885B-4903-4D54-9A93-00025F12DED9}" type="datetimeFigureOut">
               <a:rPr kumimoji="1" lang="ja-JP" altLang="en-US" smtClean="0"/>
-              <a:t>2025/2/7</a:t>
+              <a:t>2025/3/3</a:t>
             </a:fld>
             <a:endParaRPr kumimoji="1" lang="ja-JP" altLang="en-US"/>
           </a:p>
@@ -2300,7 +2300,7 @@
           <a:p>
             <a:fld id="{E9CC885B-4903-4D54-9A93-00025F12DED9}" type="datetimeFigureOut">
               <a:rPr kumimoji="1" lang="ja-JP" altLang="en-US" smtClean="0"/>
-              <a:t>2025/2/7</a:t>
+              <a:t>2025/3/3</a:t>
             </a:fld>
             <a:endParaRPr kumimoji="1" lang="ja-JP" altLang="en-US"/>
           </a:p>
@@ -2643,7 +2643,7 @@
           <a:p>
             <a:fld id="{E9CC885B-4903-4D54-9A93-00025F12DED9}" type="datetimeFigureOut">
               <a:rPr kumimoji="1" lang="ja-JP" altLang="en-US" smtClean="0"/>
-              <a:t>2025/2/7</a:t>
+              <a:t>2025/3/3</a:t>
             </a:fld>
             <a:endParaRPr kumimoji="1" lang="ja-JP" altLang="en-US"/>
           </a:p>
@@ -2931,7 +2931,7 @@
           <a:p>
             <a:fld id="{E9CC885B-4903-4D54-9A93-00025F12DED9}" type="datetimeFigureOut">
               <a:rPr kumimoji="1" lang="ja-JP" altLang="en-US" smtClean="0"/>
-              <a:t>2025/2/7</a:t>
+              <a:t>2025/3/3</a:t>
             </a:fld>
             <a:endParaRPr kumimoji="1" lang="ja-JP" altLang="en-US"/>
           </a:p>
@@ -3204,7 +3204,7 @@
           <a:p>
             <a:fld id="{E9CC885B-4903-4D54-9A93-00025F12DED9}" type="datetimeFigureOut">
               <a:rPr kumimoji="1" lang="ja-JP" altLang="en-US" smtClean="0"/>
-              <a:t>2025/2/7</a:t>
+              <a:t>2025/3/3</a:t>
             </a:fld>
             <a:endParaRPr kumimoji="1" lang="ja-JP" altLang="en-US"/>
           </a:p>
@@ -4397,12 +4397,8 @@
               <a:t>の</a:t>
             </a:r>
             <a:r>
-              <a:rPr lang="en-US" altLang="ja-JP" sz="2400" dirty="0" err="1"/>
-              <a:t>m_</a:t>
-            </a:r>
-            <a:r>
               <a:rPr lang="en-US" altLang="ja-JP" sz="2400" b="1" dirty="0" err="1"/>
-              <a:t>FarmName</a:t>
+              <a:t>m_FarmName</a:t>
             </a:r>
             <a:r>
               <a:rPr lang="ja-JP" altLang="en-US" sz="2400" dirty="0"/>
